--- a/public/fun/pack/pptx/wedding/결혼식_05_감사·답례중심_청보리밭.pptx
+++ b/public/fun/pack/pptx/wedding/결혼식_05_감사·답례중심_청보리밭.pptx
@@ -3347,7 +3347,7 @@
             <a:r>
               <a:rPr sz="3600" b="1" i="0">
                 <a:solidFill>
-                  <a:srgbClr val="2F481E"/>
+                  <a:srgbClr val="416F1F"/>
                 </a:solidFill>
               </a:rPr>
               <a:t>저희 결혼합니다</a:t>
@@ -3385,7 +3385,7 @@
             <a:r>
               <a:rPr sz="1700" b="0" i="1">
                 <a:solidFill>
-                  <a:srgbClr val="2F481E"/>
+                  <a:srgbClr val="416F1F"/>
                 </a:solidFill>
               </a:rPr>
               <a:t>와 주셔서 고맙습니다</a:t>
@@ -3487,7 +3487,7 @@
             <a:avLst/>
           </a:prstGeom>
           <a:solidFill>
-            <a:srgbClr val="DEEFD2"/>
+            <a:srgbClr val="E3F7D4"/>
           </a:solidFill>
           <a:ln>
             <a:noFill/>
@@ -3516,7 +3516,7 @@
             <a:avLst/>
           </a:prstGeom>
           <a:solidFill>
-            <a:srgbClr val="5F913B"/>
+            <a:srgbClr val="82CD4C"/>
           </a:solidFill>
           <a:ln>
             <a:noFill/>
@@ -3560,7 +3560,7 @@
             <a:r>
               <a:rPr sz="3000" b="1" i="0">
                 <a:solidFill>
-                  <a:srgbClr val="2F481E"/>
+                  <a:srgbClr val="416F1F"/>
                 </a:solidFill>
               </a:rPr>
               <a:t>신랑 · 신부 소개</a:t>
@@ -3583,11 +3583,11 @@
             <a:avLst/>
           </a:prstGeom>
           <a:solidFill>
-            <a:srgbClr val="DEEFD2"/>
+            <a:srgbClr val="E3F7D4"/>
           </a:solidFill>
           <a:ln w="19050">
             <a:solidFill>
-              <a:srgbClr val="5F913B"/>
+              <a:srgbClr val="82CD4C"/>
             </a:solidFill>
             <a:prstDash val="dash"/>
           </a:ln>
@@ -3606,7 +3606,7 @@
             <a:r>
               <a:rPr sz="1200" b="0" i="0">
                 <a:solidFill>
-                  <a:srgbClr val="2F481E"/>
+                  <a:srgbClr val="416F1F"/>
                 </a:solidFill>
               </a:rPr>
               <a:t>사진</a:t>
@@ -3644,7 +3644,7 @@
             <a:r>
               <a:rPr sz="1600" b="1" i="0">
                 <a:solidFill>
-                  <a:srgbClr val="2F481E"/>
+                  <a:srgbClr val="416F1F"/>
                 </a:solidFill>
               </a:rPr>
               <a:t>신랑</a:t>
@@ -3735,11 +3735,11 @@
             <a:avLst/>
           </a:prstGeom>
           <a:solidFill>
-            <a:srgbClr val="DEEFD2"/>
+            <a:srgbClr val="E3F7D4"/>
           </a:solidFill>
           <a:ln w="19050">
             <a:solidFill>
-              <a:srgbClr val="5F913B"/>
+              <a:srgbClr val="82CD4C"/>
             </a:solidFill>
             <a:prstDash val="dash"/>
           </a:ln>
@@ -3758,7 +3758,7 @@
             <a:r>
               <a:rPr sz="1200" b="0" i="0">
                 <a:solidFill>
-                  <a:srgbClr val="2F481E"/>
+                  <a:srgbClr val="416F1F"/>
                 </a:solidFill>
               </a:rPr>
               <a:t>사진</a:t>
@@ -3796,7 +3796,7 @@
             <a:r>
               <a:rPr sz="1600" b="1" i="0">
                 <a:solidFill>
-                  <a:srgbClr val="2F481E"/>
+                  <a:srgbClr val="416F1F"/>
                 </a:solidFill>
               </a:rPr>
               <a:t>신부</a:t>
@@ -3913,7 +3913,7 @@
             <a:avLst/>
           </a:prstGeom>
           <a:solidFill>
-            <a:srgbClr val="DEEFD2"/>
+            <a:srgbClr val="E3F7D4"/>
           </a:solidFill>
           <a:ln>
             <a:noFill/>
@@ -3942,7 +3942,7 @@
             <a:avLst/>
           </a:prstGeom>
           <a:solidFill>
-            <a:srgbClr val="5F913B"/>
+            <a:srgbClr val="82CD4C"/>
           </a:solidFill>
           <a:ln>
             <a:noFill/>
@@ -3986,7 +3986,7 @@
             <a:r>
               <a:rPr sz="3000" b="1" i="0">
                 <a:solidFill>
-                  <a:srgbClr val="2F481E"/>
+                  <a:srgbClr val="416F1F"/>
                 </a:solidFill>
               </a:rPr>
               <a:t>감사의 말씀</a:t>
@@ -4011,11 +4011,11 @@
             </a:avLst>
           </a:prstGeom>
           <a:solidFill>
-            <a:srgbClr val="F4F9F1"/>
+            <a:srgbClr val="F7FCF3"/>
           </a:solidFill>
           <a:ln w="12700">
             <a:solidFill>
-              <a:srgbClr val="DEEFD2"/>
+              <a:srgbClr val="E3F7D4"/>
             </a:solidFill>
           </a:ln>
         </p:spPr>
@@ -4181,7 +4181,7 @@
             <a:avLst/>
           </a:prstGeom>
           <a:solidFill>
-            <a:srgbClr val="DEEFD2"/>
+            <a:srgbClr val="E3F7D4"/>
           </a:solidFill>
           <a:ln>
             <a:noFill/>
@@ -4210,7 +4210,7 @@
             <a:avLst/>
           </a:prstGeom>
           <a:solidFill>
-            <a:srgbClr val="5F913B"/>
+            <a:srgbClr val="82CD4C"/>
           </a:solidFill>
           <a:ln>
             <a:noFill/>
@@ -4254,7 +4254,7 @@
             <a:r>
               <a:rPr sz="3000" b="1" i="0">
                 <a:solidFill>
-                  <a:srgbClr val="2F481E"/>
+                  <a:srgbClr val="416F1F"/>
                 </a:solidFill>
               </a:rPr>
               <a:t>답례 안내</a:t>
@@ -4279,11 +4279,11 @@
             </a:avLst>
           </a:prstGeom>
           <a:solidFill>
-            <a:srgbClr val="F4F9F1"/>
+            <a:srgbClr val="F7FCF3"/>
           </a:solidFill>
           <a:ln w="15875">
             <a:solidFill>
-              <a:srgbClr val="DEEFD2"/>
+              <a:srgbClr val="E3F7D4"/>
             </a:solidFill>
           </a:ln>
         </p:spPr>
@@ -4310,7 +4310,7 @@
             <a:avLst/>
           </a:prstGeom>
           <a:solidFill>
-            <a:srgbClr val="5F913B"/>
+            <a:srgbClr val="82CD4C"/>
           </a:solidFill>
           <a:ln>
             <a:noFill/>
@@ -4368,7 +4368,7 @@
             <a:r>
               <a:rPr sz="1800" b="1" i="0">
                 <a:solidFill>
-                  <a:srgbClr val="2F481E"/>
+                  <a:srgbClr val="416F1F"/>
                 </a:solidFill>
               </a:rPr>
               <a:t>답례품</a:t>
@@ -4431,11 +4431,11 @@
             </a:avLst>
           </a:prstGeom>
           <a:solidFill>
-            <a:srgbClr val="F4F9F1"/>
+            <a:srgbClr val="F7FCF3"/>
           </a:solidFill>
           <a:ln w="15875">
             <a:solidFill>
-              <a:srgbClr val="DEEFD2"/>
+              <a:srgbClr val="E3F7D4"/>
             </a:solidFill>
           </a:ln>
         </p:spPr>
@@ -4462,7 +4462,7 @@
             <a:avLst/>
           </a:prstGeom>
           <a:solidFill>
-            <a:srgbClr val="5F913B"/>
+            <a:srgbClr val="82CD4C"/>
           </a:solidFill>
           <a:ln>
             <a:noFill/>
@@ -4520,7 +4520,7 @@
             <a:r>
               <a:rPr sz="1800" b="1" i="0">
                 <a:solidFill>
-                  <a:srgbClr val="2F481E"/>
+                  <a:srgbClr val="416F1F"/>
                 </a:solidFill>
               </a:rPr>
               <a:t>방명록</a:t>
@@ -4583,11 +4583,11 @@
             </a:avLst>
           </a:prstGeom>
           <a:solidFill>
-            <a:srgbClr val="F4F9F1"/>
+            <a:srgbClr val="F7FCF3"/>
           </a:solidFill>
           <a:ln w="15875">
             <a:solidFill>
-              <a:srgbClr val="DEEFD2"/>
+              <a:srgbClr val="E3F7D4"/>
             </a:solidFill>
           </a:ln>
         </p:spPr>
@@ -4614,7 +4614,7 @@
             <a:avLst/>
           </a:prstGeom>
           <a:solidFill>
-            <a:srgbClr val="5F913B"/>
+            <a:srgbClr val="82CD4C"/>
           </a:solidFill>
           <a:ln>
             <a:noFill/>
@@ -4672,7 +4672,7 @@
             <a:r>
               <a:rPr sz="1800" b="1" i="0">
                 <a:solidFill>
-                  <a:srgbClr val="2F481E"/>
+                  <a:srgbClr val="416F1F"/>
                 </a:solidFill>
               </a:rPr>
               <a:t>사진 · 영상</a:t>
@@ -4759,7 +4759,7 @@
             <a:avLst/>
           </a:prstGeom>
           <a:solidFill>
-            <a:srgbClr val="DEEFD2"/>
+            <a:srgbClr val="E3F7D4"/>
           </a:solidFill>
           <a:ln>
             <a:noFill/>
@@ -4788,7 +4788,7 @@
             <a:avLst/>
           </a:prstGeom>
           <a:solidFill>
-            <a:srgbClr val="5F913B"/>
+            <a:srgbClr val="82CD4C"/>
           </a:solidFill>
           <a:ln>
             <a:noFill/>
@@ -4832,7 +4832,7 @@
             <a:r>
               <a:rPr sz="3000" b="1" i="0">
                 <a:solidFill>
-                  <a:srgbClr val="2F481E"/>
+                  <a:srgbClr val="416F1F"/>
                 </a:solidFill>
               </a:rPr>
               <a:t>웨딩 사진</a:t>
@@ -4857,11 +4857,11 @@
             </a:avLst>
           </a:prstGeom>
           <a:solidFill>
-            <a:srgbClr val="DEEFD2"/>
+            <a:srgbClr val="E3F7D4"/>
           </a:solidFill>
           <a:ln w="19050">
             <a:solidFill>
-              <a:srgbClr val="5F913B"/>
+              <a:srgbClr val="82CD4C"/>
             </a:solidFill>
             <a:prstDash val="dash"/>
           </a:ln>
@@ -4880,7 +4880,7 @@
             <a:r>
               <a:rPr sz="1200" b="0" i="0">
                 <a:solidFill>
-                  <a:srgbClr val="2F481E"/>
+                  <a:srgbClr val="416F1F"/>
                 </a:solidFill>
               </a:rPr>
               <a:t>사진 1</a:t>
@@ -4905,11 +4905,11 @@
             </a:avLst>
           </a:prstGeom>
           <a:solidFill>
-            <a:srgbClr val="DEEFD2"/>
+            <a:srgbClr val="E3F7D4"/>
           </a:solidFill>
           <a:ln w="19050">
             <a:solidFill>
-              <a:srgbClr val="5F913B"/>
+              <a:srgbClr val="82CD4C"/>
             </a:solidFill>
             <a:prstDash val="dash"/>
           </a:ln>
@@ -4928,7 +4928,7 @@
             <a:r>
               <a:rPr sz="1200" b="0" i="0">
                 <a:solidFill>
-                  <a:srgbClr val="2F481E"/>
+                  <a:srgbClr val="416F1F"/>
                 </a:solidFill>
               </a:rPr>
               <a:t>사진 2</a:t>
@@ -4953,11 +4953,11 @@
             </a:avLst>
           </a:prstGeom>
           <a:solidFill>
-            <a:srgbClr val="DEEFD2"/>
+            <a:srgbClr val="E3F7D4"/>
           </a:solidFill>
           <a:ln w="19050">
             <a:solidFill>
-              <a:srgbClr val="5F913B"/>
+              <a:srgbClr val="82CD4C"/>
             </a:solidFill>
             <a:prstDash val="dash"/>
           </a:ln>
@@ -4976,7 +4976,7 @@
             <a:r>
               <a:rPr sz="1200" b="0" i="0">
                 <a:solidFill>
-                  <a:srgbClr val="2F481E"/>
+                  <a:srgbClr val="416F1F"/>
                 </a:solidFill>
               </a:rPr>
               <a:t>사진 3</a:t>
@@ -5001,11 +5001,11 @@
             </a:avLst>
           </a:prstGeom>
           <a:solidFill>
-            <a:srgbClr val="DEEFD2"/>
+            <a:srgbClr val="E3F7D4"/>
           </a:solidFill>
           <a:ln w="19050">
             <a:solidFill>
-              <a:srgbClr val="5F913B"/>
+              <a:srgbClr val="82CD4C"/>
             </a:solidFill>
             <a:prstDash val="dash"/>
           </a:ln>
@@ -5024,7 +5024,7 @@
             <a:r>
               <a:rPr sz="1200" b="0" i="0">
                 <a:solidFill>
-                  <a:srgbClr val="2F481E"/>
+                  <a:srgbClr val="416F1F"/>
                 </a:solidFill>
               </a:rPr>
               <a:t>사진 4</a:t>
@@ -5049,11 +5049,11 @@
             </a:avLst>
           </a:prstGeom>
           <a:solidFill>
-            <a:srgbClr val="DEEFD2"/>
+            <a:srgbClr val="E3F7D4"/>
           </a:solidFill>
           <a:ln w="19050">
             <a:solidFill>
-              <a:srgbClr val="5F913B"/>
+              <a:srgbClr val="82CD4C"/>
             </a:solidFill>
             <a:prstDash val="dash"/>
           </a:ln>
@@ -5072,7 +5072,7 @@
             <a:r>
               <a:rPr sz="1200" b="0" i="0">
                 <a:solidFill>
-                  <a:srgbClr val="2F481E"/>
+                  <a:srgbClr val="416F1F"/>
                 </a:solidFill>
               </a:rPr>
               <a:t>사진 5</a:t>
@@ -5097,11 +5097,11 @@
             </a:avLst>
           </a:prstGeom>
           <a:solidFill>
-            <a:srgbClr val="DEEFD2"/>
+            <a:srgbClr val="E3F7D4"/>
           </a:solidFill>
           <a:ln w="19050">
             <a:solidFill>
-              <a:srgbClr val="5F913B"/>
+              <a:srgbClr val="82CD4C"/>
             </a:solidFill>
             <a:prstDash val="dash"/>
           </a:ln>
@@ -5120,7 +5120,7 @@
             <a:r>
               <a:rPr sz="1200" b="0" i="0">
                 <a:solidFill>
-                  <a:srgbClr val="2F481E"/>
+                  <a:srgbClr val="416F1F"/>
                 </a:solidFill>
               </a:rPr>
               <a:t>사진 6</a:t>
@@ -5200,7 +5200,7 @@
             <a:r>
               <a:rPr sz="3400" b="1" i="0">
                 <a:solidFill>
-                  <a:srgbClr val="2F481E"/>
+                  <a:srgbClr val="416F1F"/>
                 </a:solidFill>
               </a:rPr>
               <a:t>와 주셔서 고맙습니다</a:t>
@@ -5238,7 +5238,7 @@
             <a:r>
               <a:rPr sz="1700" b="0" i="1">
                 <a:solidFill>
-                  <a:srgbClr val="2F481E"/>
+                  <a:srgbClr val="416F1F"/>
                 </a:solidFill>
               </a:rPr>
               <a:t>잘 살겠습니다</a:t>
@@ -5303,34 +5303,34 @@
         <a:sysClr val="window" lastClr="FFFFFF"/>
       </a:lt1>
       <a:dk2>
-        <a:srgbClr val="2F481E"/>
+        <a:srgbClr val="416F1F"/>
       </a:dk2>
       <a:lt2>
-        <a:srgbClr val="F4F9F1"/>
+        <a:srgbClr val="F7FCF3"/>
       </a:lt2>
       <a:accent1>
-        <a:srgbClr val="5F913B"/>
+        <a:srgbClr val="82CD4C"/>
       </a:accent1>
       <a:accent2>
-        <a:srgbClr val="423B91"/>
+        <a:srgbClr val="339941"/>
       </a:accent2>
       <a:accent3>
-        <a:srgbClr val="2F481E"/>
+        <a:srgbClr val="416F1F"/>
       </a:accent3>
       <a:accent4>
-        <a:srgbClr val="DEEFD2"/>
+        <a:srgbClr val="E3F7D4"/>
       </a:accent4>
       <a:accent5>
-        <a:srgbClr val="506666"/>
+        <a:srgbClr val="5AB346"/>
       </a:accent5>
       <a:accent6>
-        <a:srgbClr val="829178"/>
+        <a:srgbClr val="8DA979"/>
       </a:accent6>
       <a:hlink>
-        <a:srgbClr val="5F913B"/>
+        <a:srgbClr val="82CD4C"/>
       </a:hlink>
       <a:folHlink>
-        <a:srgbClr val="2F481E"/>
+        <a:srgbClr val="416F1F"/>
       </a:folHlink>
     </a:clrScheme>
     <a:fontScheme name="Office">

--- a/public/fun/pack/pptx/wedding/결혼식_05_감사·답례중심_청보리밭.pptx
+++ b/public/fun/pack/pptx/wedding/결혼식_05_감사·답례중심_청보리밭.pptx
@@ -3286,6 +3286,14 @@
 <file path=ppt/slides/slide1.xml><?xml version="1.0" encoding="utf-8"?>
 <p:sld xmlns:a="http://schemas.openxmlformats.org/drawingml/2006/main" xmlns:p="http://schemas.openxmlformats.org/presentationml/2006/main" xmlns:r="http://schemas.openxmlformats.org/officeDocument/2006/relationships">
   <p:cSld>
+    <p:bg>
+      <p:bgPr>
+        <a:solidFill>
+          <a:srgbClr val="F2FDEA"/>
+        </a:solidFill>
+        <a:effectLst/>
+      </p:bgPr>
+    </p:bg>
     <p:spTree>
       <p:nvGrpSpPr>
         <p:cNvPr id="1" name=""/>
@@ -3293,30 +3301,120 @@
         <p:nvPr/>
       </p:nvGrpSpPr>
       <p:grpSpPr/>
-      <p:pic>
-        <p:nvPicPr>
-          <p:cNvPr id="3" name="표지 그림" descr="wedding-05.jpg"/>
-          <p:cNvPicPr>
-            <a:picLocks noChangeAspect="1"/>
-          </p:cNvPicPr>
+      <p:sp>
+        <p:nvSpPr>
+          <p:cNvPr id="3" name="사진 자리"/>
+          <p:cNvSpPr/>
           <p:nvPr/>
-        </p:nvPicPr>
-        <p:blipFill>
-          <a:blip r:embed="rId2"/>
-          <a:stretch>
-            <a:fillRect/>
-          </a:stretch>
-        </p:blipFill>
-        <p:spPr>
-          <a:xfrm>
-            <a:off x="0" y="0"/>
-            <a:ext cx="12191695" cy="6858000"/>
+        </p:nvSpPr>
+        <p:spPr>
+          <a:xfrm>
+            <a:off x="7071183" y="960120"/>
+            <a:ext cx="3657508" cy="4526280"/>
+          </a:xfrm>
+          <a:prstGeom prst="roundRect">
+            <a:avLst>
+              <a:gd name="adj" fmla="val 4000"/>
+            </a:avLst>
+          </a:prstGeom>
+          <a:solidFill>
+            <a:srgbClr val="C6F2A6"/>
+          </a:solidFill>
+          <a:ln>
+            <a:noFill/>
+          </a:ln>
+        </p:spPr>
+        <p:txBody>
+          <a:bodyPr rtlCol="0" anchor="ctr" wrap="square" lIns="54864" rIns="54864" tIns="27432" bIns="27432">
+            <a:noAutofit/>
+          </a:bodyPr>
+          <a:lstStyle/>
+          <a:p>
+            <a:pPr algn="ctr">
+              <a:lnSpc>
+                <a:spcPct val="100000"/>
+              </a:lnSpc>
+            </a:pPr>
+            <a:r>
+              <a:rPr sz="1400" b="0" i="0">
+                <a:solidFill>
+                  <a:srgbClr val="354927"/>
+                </a:solidFill>
+              </a:rPr>
+              <a:t>사진을 넣어 주세요</a:t>
+            </a:r>
+          </a:p>
+        </p:txBody>
+      </p:sp>
+      <p:sp>
+        <p:nvSpPr>
+          <p:cNvPr id="4" name="장식"/>
+          <p:cNvSpPr/>
+          <p:nvPr/>
+        </p:nvSpPr>
+        <p:spPr>
+          <a:xfrm>
+            <a:off x="7558851" y="1234439"/>
+            <a:ext cx="3657508" cy="4526280"/>
+          </a:xfrm>
+          <a:prstGeom prst="roundRect">
+            <a:avLst>
+              <a:gd name="adj" fmla="val 4000"/>
+            </a:avLst>
+          </a:prstGeom>
+          <a:noFill/>
+          <a:ln w="9525">
+            <a:solidFill>
+              <a:srgbClr val="26231F"/>
+            </a:solidFill>
+          </a:ln>
+        </p:spPr>
+        <p:txBody>
+          <a:bodyPr rtlCol="0" anchor="ctr"/>
+          <a:lstStyle/>
+          <a:p>
+            <a:pPr algn="ctr"/>
+          </a:p>
+        </p:txBody>
+      </p:sp>
+      <p:sp>
+        <p:nvSpPr>
+          <p:cNvPr id="5" name="라벨"/>
+          <p:cNvSpPr txBox="1"/>
+          <p:nvPr/>
+        </p:nvSpPr>
+        <p:spPr>
+          <a:xfrm>
+            <a:off x="822960" y="2148840"/>
+            <a:ext cx="5608179" cy="274320"/>
           </a:xfrm>
           <a:prstGeom prst="rect">
             <a:avLst/>
           </a:prstGeom>
-        </p:spPr>
-      </p:pic>
+          <a:noFill/>
+        </p:spPr>
+        <p:txBody>
+          <a:bodyPr wrap="square" lIns="54864" rIns="54864" tIns="27432" bIns="27432" anchor="t">
+            <a:noAutofit/>
+          </a:bodyPr>
+          <a:lstStyle/>
+          <a:p>
+            <a:pPr algn="l">
+              <a:lnSpc>
+                <a:spcPct val="115000"/>
+              </a:lnSpc>
+            </a:pPr>
+            <a:r>
+              <a:rPr sz="1000" b="1" i="0" spc="250">
+                <a:solidFill>
+                  <a:srgbClr val="26231F"/>
+                </a:solidFill>
+              </a:rPr>
+              <a:t>WEDDING</a:t>
+            </a:r>
+          </a:p>
+        </p:txBody>
+      </p:sp>
       <p:sp>
         <p:nvSpPr>
           <p:cNvPr id="2" name="Title 1"/>
@@ -3329,8 +3427,8 @@
         </p:nvSpPr>
         <p:spPr>
           <a:xfrm>
-            <a:off x="853418" y="2057400"/>
-            <a:ext cx="6095847" cy="1554480"/>
+            <a:off x="822960" y="2606040"/>
+            <a:ext cx="5608179" cy="1188720"/>
           </a:xfrm>
         </p:spPr>
         <p:txBody>
@@ -3347,7 +3445,7 @@
             <a:r>
               <a:rPr sz="3600" b="1" i="0">
                 <a:solidFill>
-                  <a:srgbClr val="416F1F"/>
+                  <a:srgbClr val="26231F"/>
                 </a:solidFill>
               </a:rPr>
               <a:t>저희 결혼합니다</a:t>
@@ -3357,14 +3455,14 @@
       </p:sp>
       <p:sp>
         <p:nvSpPr>
-          <p:cNvPr id="4" name="한 줄 문구"/>
+          <p:cNvPr id="6" name="한 줄 문구"/>
           <p:cNvSpPr txBox="1"/>
           <p:nvPr/>
         </p:nvSpPr>
         <p:spPr>
           <a:xfrm>
-            <a:off x="853418" y="3749039"/>
-            <a:ext cx="6095847" cy="822960"/>
+            <a:off x="822960" y="3886200"/>
+            <a:ext cx="5608179" cy="822960"/>
           </a:xfrm>
           <a:prstGeom prst="rect">
             <a:avLst/>
@@ -3383,9 +3481,9 @@
               </a:lnSpc>
             </a:pPr>
             <a:r>
-              <a:rPr sz="1700" b="0" i="1">
-                <a:solidFill>
-                  <a:srgbClr val="416F1F"/>
+              <a:rPr sz="1700" b="0" i="0">
+                <a:solidFill>
+                  <a:srgbClr val="26231F"/>
                 </a:solidFill>
               </a:rPr>
               <a:t>와 주셔서 고맙습니다</a:t>
@@ -3395,14 +3493,14 @@
       </p:sp>
       <p:sp>
         <p:nvSpPr>
-          <p:cNvPr id="5" name="안내 문구"/>
+          <p:cNvPr id="7" name="안내 문구"/>
           <p:cNvSpPr txBox="1"/>
           <p:nvPr/>
         </p:nvSpPr>
         <p:spPr>
           <a:xfrm>
-            <a:off x="853418" y="4617720"/>
-            <a:ext cx="6095847" cy="914400"/>
+            <a:off x="822960" y="4754880"/>
+            <a:ext cx="5608179" cy="914400"/>
           </a:xfrm>
           <a:prstGeom prst="rect">
             <a:avLst/>
@@ -3423,7 +3521,7 @@
             <a:r>
               <a:rPr sz="1400" b="0" i="0">
                 <a:solidFill>
-                  <a:srgbClr val="666666"/>
+                  <a:srgbClr val="26231F"/>
                 </a:solidFill>
               </a:rPr>
               <a:t>신랑 이름 ♥ 신부 이름</a:t>
@@ -3438,10 +3536,10 @@
             <a:r>
               <a:rPr sz="1400" b="0" i="0">
                 <a:solidFill>
-                  <a:srgbClr val="666666"/>
+                  <a:srgbClr val="26231F"/>
                 </a:solidFill>
               </a:rPr>
-              <a:t>2027. 00. 00 · 예식장 이름</a:t>
+              <a:t>날짜 입력 · 예식장 이름</a:t>
             </a:r>
           </a:p>
         </p:txBody>
@@ -3460,7 +3558,7 @@
     <p:bg>
       <p:bgPr>
         <a:solidFill>
-          <a:srgbClr val="FFFFFF"/>
+          <a:srgbClr val="FBFDFA"/>
         </a:solidFill>
         <a:effectLst/>
       </p:bgPr>
@@ -3480,14 +3578,16 @@
         </p:nvSpPr>
         <p:spPr>
           <a:xfrm>
-            <a:off x="9905695" y="-1463040"/>
-            <a:ext cx="3840480" cy="3840480"/>
-          </a:xfrm>
-          <a:prstGeom prst="ellipse">
-            <a:avLst/>
+            <a:off x="640080" y="566928"/>
+            <a:ext cx="64008" cy="868680"/>
+          </a:xfrm>
+          <a:prstGeom prst="roundRect">
+            <a:avLst>
+              <a:gd name="adj" fmla="val 50000"/>
+            </a:avLst>
           </a:prstGeom>
           <a:solidFill>
-            <a:srgbClr val="E3F7D4"/>
+            <a:srgbClr val="BBED97"/>
           </a:solidFill>
           <a:ln>
             <a:noFill/>
@@ -3503,20 +3603,58 @@
       </p:sp>
       <p:sp>
         <p:nvSpPr>
-          <p:cNvPr id="4" name="장식"/>
+          <p:cNvPr id="4" name="상단 라벨"/>
+          <p:cNvSpPr txBox="1"/>
+          <p:nvPr/>
+        </p:nvSpPr>
+        <p:spPr>
+          <a:xfrm>
+            <a:off x="868680" y="274320"/>
+            <a:ext cx="5486400" cy="274320"/>
+          </a:xfrm>
+          <a:prstGeom prst="rect">
+            <a:avLst/>
+          </a:prstGeom>
+          <a:noFill/>
+        </p:spPr>
+        <p:txBody>
+          <a:bodyPr wrap="square" lIns="54864" rIns="54864" tIns="27432" bIns="27432" anchor="ctr">
+            <a:noAutofit/>
+          </a:bodyPr>
+          <a:lstStyle/>
+          <a:p>
+            <a:pPr algn="l">
+              <a:lnSpc>
+                <a:spcPct val="115000"/>
+              </a:lnSpc>
+            </a:pPr>
+            <a:r>
+              <a:rPr sz="900" b="1" i="0" spc="250">
+                <a:solidFill>
+                  <a:srgbClr val="8E8780"/>
+                </a:solidFill>
+              </a:rPr>
+              <a:t>WEDDING</a:t>
+            </a:r>
+          </a:p>
+        </p:txBody>
+      </p:sp>
+      <p:sp>
+        <p:nvSpPr>
+          <p:cNvPr id="5" name="포인트"/>
           <p:cNvSpPr/>
           <p:nvPr/>
         </p:nvSpPr>
         <p:spPr>
           <a:xfrm>
-            <a:off x="11094415" y="274320"/>
-            <a:ext cx="411480" cy="411480"/>
-          </a:xfrm>
-          <a:prstGeom prst="ellipse">
+            <a:off x="11167567" y="667512"/>
+            <a:ext cx="310896" cy="310896"/>
+          </a:xfrm>
+          <a:prstGeom prst="star4">
             <a:avLst/>
           </a:prstGeom>
           <a:solidFill>
-            <a:srgbClr val="82CD4C"/>
+            <a:srgbClr val="C6F2A6"/>
           </a:solidFill>
           <a:ln>
             <a:noFill/>
@@ -3542,8 +3680,8 @@
         </p:nvSpPr>
         <p:spPr>
           <a:xfrm>
-            <a:off x="640080" y="457200"/>
-            <a:ext cx="9722815" cy="868680"/>
+            <a:off x="868680" y="566928"/>
+            <a:ext cx="9448495" cy="868680"/>
           </a:xfrm>
         </p:spPr>
         <p:txBody>
@@ -3560,7 +3698,7 @@
             <a:r>
               <a:rPr sz="3000" b="1" i="0">
                 <a:solidFill>
-                  <a:srgbClr val="416F1F"/>
+                  <a:srgbClr val="26231F"/>
                 </a:solidFill>
               </a:rPr>
               <a:t>신랑 · 신부 소개</a:t>
@@ -3570,25 +3708,23 @@
       </p:sp>
       <p:sp>
         <p:nvSpPr>
-          <p:cNvPr id="5" name="사진 자리"/>
+          <p:cNvPr id="6" name="사진 자리"/>
           <p:cNvSpPr/>
           <p:nvPr/>
         </p:nvSpPr>
         <p:spPr>
           <a:xfrm>
-            <a:off x="1939213" y="1600200"/>
-            <a:ext cx="2400300" cy="2400300"/>
+            <a:off x="1996363" y="1783080"/>
+            <a:ext cx="2286000" cy="2286000"/>
           </a:xfrm>
           <a:prstGeom prst="ellipse">
             <a:avLst/>
           </a:prstGeom>
           <a:solidFill>
-            <a:srgbClr val="E3F7D4"/>
+            <a:srgbClr val="E2FAD1"/>
           </a:solidFill>
           <a:ln w="19050">
-            <a:solidFill>
-              <a:srgbClr val="82CD4C"/>
-            </a:solidFill>
+            <a:noFill/>
             <a:prstDash val="dash"/>
           </a:ln>
         </p:spPr>
@@ -3606,7 +3742,7 @@
             <a:r>
               <a:rPr sz="1200" b="0" i="0">
                 <a:solidFill>
-                  <a:srgbClr val="416F1F"/>
+                  <a:srgbClr val="8E8780"/>
                 </a:solidFill>
               </a:rPr>
               <a:t>사진</a:t>
@@ -3616,13 +3752,13 @@
       </p:sp>
       <p:sp>
         <p:nvSpPr>
-          <p:cNvPr id="6" name="TextBox 5"/>
+          <p:cNvPr id="7" name="TextBox 6"/>
           <p:cNvSpPr txBox="1"/>
           <p:nvPr/>
         </p:nvSpPr>
         <p:spPr>
           <a:xfrm>
-            <a:off x="640080" y="4091939"/>
+            <a:off x="640080" y="4160520"/>
             <a:ext cx="4998567" cy="411480"/>
           </a:xfrm>
           <a:prstGeom prst="rect">
@@ -3644,7 +3780,7 @@
             <a:r>
               <a:rPr sz="1600" b="1" i="0">
                 <a:solidFill>
-                  <a:srgbClr val="416F1F"/>
+                  <a:srgbClr val="354927"/>
                 </a:solidFill>
               </a:rPr>
               <a:t>신랑</a:t>
@@ -3654,14 +3790,14 @@
       </p:sp>
       <p:sp>
         <p:nvSpPr>
-          <p:cNvPr id="7" name="TextBox 6"/>
+          <p:cNvPr id="8" name="TextBox 7"/>
           <p:cNvSpPr txBox="1"/>
           <p:nvPr/>
         </p:nvSpPr>
         <p:spPr>
           <a:xfrm>
-            <a:off x="731519" y="4549140"/>
-            <a:ext cx="4815687" cy="1851660"/>
+            <a:off x="731519" y="4617720"/>
+            <a:ext cx="4815687" cy="1737360"/>
           </a:xfrm>
           <a:prstGeom prst="rect">
             <a:avLst/>
@@ -3722,25 +3858,23 @@
       </p:sp>
       <p:sp>
         <p:nvSpPr>
-          <p:cNvPr id="8" name="사진 자리"/>
+          <p:cNvPr id="9" name="사진 자리"/>
           <p:cNvSpPr/>
           <p:nvPr/>
         </p:nvSpPr>
         <p:spPr>
           <a:xfrm>
-            <a:off x="7852181" y="1600200"/>
-            <a:ext cx="2400300" cy="2400300"/>
+            <a:off x="7909331" y="1783080"/>
+            <a:ext cx="2286000" cy="2286000"/>
           </a:xfrm>
           <a:prstGeom prst="ellipse">
             <a:avLst/>
           </a:prstGeom>
           <a:solidFill>
-            <a:srgbClr val="E3F7D4"/>
+            <a:srgbClr val="E2FAD1"/>
           </a:solidFill>
           <a:ln w="19050">
-            <a:solidFill>
-              <a:srgbClr val="82CD4C"/>
-            </a:solidFill>
+            <a:noFill/>
             <a:prstDash val="dash"/>
           </a:ln>
         </p:spPr>
@@ -3758,7 +3892,7 @@
             <a:r>
               <a:rPr sz="1200" b="0" i="0">
                 <a:solidFill>
-                  <a:srgbClr val="416F1F"/>
+                  <a:srgbClr val="8E8780"/>
                 </a:solidFill>
               </a:rPr>
               <a:t>사진</a:t>
@@ -3768,13 +3902,13 @@
       </p:sp>
       <p:sp>
         <p:nvSpPr>
-          <p:cNvPr id="9" name="TextBox 8"/>
+          <p:cNvPr id="10" name="TextBox 9"/>
           <p:cNvSpPr txBox="1"/>
           <p:nvPr/>
         </p:nvSpPr>
         <p:spPr>
           <a:xfrm>
-            <a:off x="6553047" y="4091939"/>
+            <a:off x="6553047" y="4160520"/>
             <a:ext cx="4998567" cy="411480"/>
           </a:xfrm>
           <a:prstGeom prst="rect">
@@ -3796,7 +3930,7 @@
             <a:r>
               <a:rPr sz="1600" b="1" i="0">
                 <a:solidFill>
-                  <a:srgbClr val="416F1F"/>
+                  <a:srgbClr val="354927"/>
                 </a:solidFill>
               </a:rPr>
               <a:t>신부</a:t>
@@ -3806,14 +3940,14 @@
       </p:sp>
       <p:sp>
         <p:nvSpPr>
-          <p:cNvPr id="10" name="TextBox 9"/>
+          <p:cNvPr id="11" name="TextBox 10"/>
           <p:cNvSpPr txBox="1"/>
           <p:nvPr/>
         </p:nvSpPr>
         <p:spPr>
           <a:xfrm>
-            <a:off x="6644487" y="4549140"/>
-            <a:ext cx="4815687" cy="1851660"/>
+            <a:off x="6644487" y="4617720"/>
+            <a:ext cx="4815687" cy="1737360"/>
           </a:xfrm>
           <a:prstGeom prst="rect">
             <a:avLst/>
@@ -3886,7 +4020,7 @@
     <p:bg>
       <p:bgPr>
         <a:solidFill>
-          <a:srgbClr val="FFFFFF"/>
+          <a:srgbClr val="FBFDFA"/>
         </a:solidFill>
         <a:effectLst/>
       </p:bgPr>
@@ -3906,14 +4040,16 @@
         </p:nvSpPr>
         <p:spPr>
           <a:xfrm>
-            <a:off x="9905695" y="-1463040"/>
-            <a:ext cx="3840480" cy="3840480"/>
-          </a:xfrm>
-          <a:prstGeom prst="ellipse">
-            <a:avLst/>
+            <a:off x="640080" y="566928"/>
+            <a:ext cx="64008" cy="868680"/>
+          </a:xfrm>
+          <a:prstGeom prst="roundRect">
+            <a:avLst>
+              <a:gd name="adj" fmla="val 50000"/>
+            </a:avLst>
           </a:prstGeom>
           <a:solidFill>
-            <a:srgbClr val="E3F7D4"/>
+            <a:srgbClr val="BBED97"/>
           </a:solidFill>
           <a:ln>
             <a:noFill/>
@@ -3929,20 +4065,58 @@
       </p:sp>
       <p:sp>
         <p:nvSpPr>
-          <p:cNvPr id="4" name="장식"/>
+          <p:cNvPr id="4" name="상단 라벨"/>
+          <p:cNvSpPr txBox="1"/>
+          <p:nvPr/>
+        </p:nvSpPr>
+        <p:spPr>
+          <a:xfrm>
+            <a:off x="868680" y="274320"/>
+            <a:ext cx="5486400" cy="274320"/>
+          </a:xfrm>
+          <a:prstGeom prst="rect">
+            <a:avLst/>
+          </a:prstGeom>
+          <a:noFill/>
+        </p:spPr>
+        <p:txBody>
+          <a:bodyPr wrap="square" lIns="54864" rIns="54864" tIns="27432" bIns="27432" anchor="ctr">
+            <a:noAutofit/>
+          </a:bodyPr>
+          <a:lstStyle/>
+          <a:p>
+            <a:pPr algn="l">
+              <a:lnSpc>
+                <a:spcPct val="115000"/>
+              </a:lnSpc>
+            </a:pPr>
+            <a:r>
+              <a:rPr sz="900" b="1" i="0" spc="250">
+                <a:solidFill>
+                  <a:srgbClr val="8E8780"/>
+                </a:solidFill>
+              </a:rPr>
+              <a:t>WEDDING</a:t>
+            </a:r>
+          </a:p>
+        </p:txBody>
+      </p:sp>
+      <p:sp>
+        <p:nvSpPr>
+          <p:cNvPr id="5" name="포인트"/>
           <p:cNvSpPr/>
           <p:nvPr/>
         </p:nvSpPr>
         <p:spPr>
           <a:xfrm>
-            <a:off x="11094415" y="274320"/>
-            <a:ext cx="411480" cy="411480"/>
-          </a:xfrm>
-          <a:prstGeom prst="ellipse">
+            <a:off x="11167567" y="667512"/>
+            <a:ext cx="310896" cy="310896"/>
+          </a:xfrm>
+          <a:prstGeom prst="star4">
             <a:avLst/>
           </a:prstGeom>
           <a:solidFill>
-            <a:srgbClr val="82CD4C"/>
+            <a:srgbClr val="C6F2A6"/>
           </a:solidFill>
           <a:ln>
             <a:noFill/>
@@ -3968,8 +4142,8 @@
         </p:nvSpPr>
         <p:spPr>
           <a:xfrm>
-            <a:off x="640080" y="457200"/>
-            <a:ext cx="9722815" cy="868680"/>
+            <a:off x="868680" y="566928"/>
+            <a:ext cx="9448495" cy="868680"/>
           </a:xfrm>
         </p:spPr>
         <p:txBody>
@@ -3986,7 +4160,7 @@
             <a:r>
               <a:rPr sz="3000" b="1" i="0">
                 <a:solidFill>
-                  <a:srgbClr val="416F1F"/>
+                  <a:srgbClr val="26231F"/>
                 </a:solidFill>
               </a:rPr>
               <a:t>감사의 말씀</a:t>
@@ -3996,27 +4170,25 @@
       </p:sp>
       <p:sp>
         <p:nvSpPr>
-          <p:cNvPr id="5" name="감사 글 칸"/>
+          <p:cNvPr id="6" name="감사 글 칸"/>
           <p:cNvSpPr/>
           <p:nvPr/>
         </p:nvSpPr>
         <p:spPr>
           <a:xfrm>
-            <a:off x="640080" y="1600200"/>
-            <a:ext cx="10911535" cy="4800600"/>
+            <a:off x="640080" y="1783080"/>
+            <a:ext cx="10911535" cy="4572000"/>
           </a:xfrm>
           <a:prstGeom prst="roundRect">
             <a:avLst>
-              <a:gd name="adj" fmla="val 8000"/>
+              <a:gd name="adj" fmla="val 7000"/>
             </a:avLst>
           </a:prstGeom>
           <a:solidFill>
-            <a:srgbClr val="F7FCF3"/>
+            <a:srgbClr val="F2FDEA"/>
           </a:solidFill>
-          <a:ln w="12700">
-            <a:solidFill>
-              <a:srgbClr val="E3F7D4"/>
-            </a:solidFill>
+          <a:ln>
+            <a:noFill/>
           </a:ln>
         </p:spPr>
         <p:txBody>
@@ -4029,14 +4201,14 @@
       </p:sp>
       <p:sp>
         <p:nvSpPr>
-          <p:cNvPr id="6" name="감사 글"/>
+          <p:cNvPr id="7" name="감사 글"/>
           <p:cNvSpPr txBox="1"/>
           <p:nvPr/>
         </p:nvSpPr>
         <p:spPr>
           <a:xfrm>
-            <a:off x="1097280" y="1965960"/>
-            <a:ext cx="9997135" cy="4069080"/>
+            <a:off x="1097280" y="2148840"/>
+            <a:ext cx="9997135" cy="3840480"/>
           </a:xfrm>
           <a:prstGeom prst="rect">
             <a:avLst/>
@@ -4057,7 +4229,7 @@
             <a:r>
               <a:rPr sz="2000" b="0" i="0">
                 <a:solidFill>
-                  <a:srgbClr val="2B2B2B"/>
+                  <a:srgbClr val="26231F"/>
                 </a:solidFill>
               </a:rPr>
               <a:t>바쁘신 중에 와 주셔서 고맙습니다.</a:t>
@@ -4072,7 +4244,7 @@
             <a:r>
               <a:rPr sz="2000" b="0" i="0">
                 <a:solidFill>
-                  <a:srgbClr val="2B2B2B"/>
+                  <a:srgbClr val="26231F"/>
                 </a:solidFill>
               </a:rPr>
               <a:t/>
@@ -4087,7 +4259,7 @@
             <a:r>
               <a:rPr sz="2000" b="0" i="0">
                 <a:solidFill>
-                  <a:srgbClr val="2B2B2B"/>
+                  <a:srgbClr val="26231F"/>
                 </a:solidFill>
               </a:rPr>
               <a:t>보내 주신 마음 잊지 않고</a:t>
@@ -4102,7 +4274,7 @@
             <a:r>
               <a:rPr sz="2000" b="0" i="0">
                 <a:solidFill>
-                  <a:srgbClr val="2B2B2B"/>
+                  <a:srgbClr val="26231F"/>
                 </a:solidFill>
               </a:rPr>
               <a:t>잘 살겠습니다.</a:t>
@@ -4117,7 +4289,7 @@
             <a:r>
               <a:rPr sz="2000" b="0" i="0">
                 <a:solidFill>
-                  <a:srgbClr val="2B2B2B"/>
+                  <a:srgbClr val="26231F"/>
                 </a:solidFill>
               </a:rPr>
               <a:t/>
@@ -4132,7 +4304,7 @@
             <a:r>
               <a:rPr sz="2000" b="0" i="0">
                 <a:solidFill>
-                  <a:srgbClr val="2B2B2B"/>
+                  <a:srgbClr val="26231F"/>
                 </a:solidFill>
               </a:rPr>
               <a:t>신랑 · 신부 드림</a:t>
@@ -4154,7 +4326,7 @@
     <p:bg>
       <p:bgPr>
         <a:solidFill>
-          <a:srgbClr val="FFFFFF"/>
+          <a:srgbClr val="FBFDFA"/>
         </a:solidFill>
         <a:effectLst/>
       </p:bgPr>
@@ -4174,14 +4346,16 @@
         </p:nvSpPr>
         <p:spPr>
           <a:xfrm>
-            <a:off x="9905695" y="-1463040"/>
-            <a:ext cx="3840480" cy="3840480"/>
-          </a:xfrm>
-          <a:prstGeom prst="ellipse">
-            <a:avLst/>
+            <a:off x="640080" y="566928"/>
+            <a:ext cx="64008" cy="868680"/>
+          </a:xfrm>
+          <a:prstGeom prst="roundRect">
+            <a:avLst>
+              <a:gd name="adj" fmla="val 50000"/>
+            </a:avLst>
           </a:prstGeom>
           <a:solidFill>
-            <a:srgbClr val="E3F7D4"/>
+            <a:srgbClr val="BBED97"/>
           </a:solidFill>
           <a:ln>
             <a:noFill/>
@@ -4197,20 +4371,58 @@
       </p:sp>
       <p:sp>
         <p:nvSpPr>
-          <p:cNvPr id="4" name="장식"/>
+          <p:cNvPr id="4" name="상단 라벨"/>
+          <p:cNvSpPr txBox="1"/>
+          <p:nvPr/>
+        </p:nvSpPr>
+        <p:spPr>
+          <a:xfrm>
+            <a:off x="868680" y="274320"/>
+            <a:ext cx="5486400" cy="274320"/>
+          </a:xfrm>
+          <a:prstGeom prst="rect">
+            <a:avLst/>
+          </a:prstGeom>
+          <a:noFill/>
+        </p:spPr>
+        <p:txBody>
+          <a:bodyPr wrap="square" lIns="54864" rIns="54864" tIns="27432" bIns="27432" anchor="ctr">
+            <a:noAutofit/>
+          </a:bodyPr>
+          <a:lstStyle/>
+          <a:p>
+            <a:pPr algn="l">
+              <a:lnSpc>
+                <a:spcPct val="115000"/>
+              </a:lnSpc>
+            </a:pPr>
+            <a:r>
+              <a:rPr sz="900" b="1" i="0" spc="250">
+                <a:solidFill>
+                  <a:srgbClr val="8E8780"/>
+                </a:solidFill>
+              </a:rPr>
+              <a:t>WEDDING</a:t>
+            </a:r>
+          </a:p>
+        </p:txBody>
+      </p:sp>
+      <p:sp>
+        <p:nvSpPr>
+          <p:cNvPr id="5" name="포인트"/>
           <p:cNvSpPr/>
           <p:nvPr/>
         </p:nvSpPr>
         <p:spPr>
           <a:xfrm>
-            <a:off x="11094415" y="274320"/>
-            <a:ext cx="411480" cy="411480"/>
-          </a:xfrm>
-          <a:prstGeom prst="ellipse">
+            <a:off x="11167567" y="667512"/>
+            <a:ext cx="310896" cy="310896"/>
+          </a:xfrm>
+          <a:prstGeom prst="star4">
             <a:avLst/>
           </a:prstGeom>
           <a:solidFill>
-            <a:srgbClr val="82CD4C"/>
+            <a:srgbClr val="C6F2A6"/>
           </a:solidFill>
           <a:ln>
             <a:noFill/>
@@ -4236,8 +4448,8 @@
         </p:nvSpPr>
         <p:spPr>
           <a:xfrm>
-            <a:off x="640080" y="457200"/>
-            <a:ext cx="9722815" cy="868680"/>
+            <a:off x="868680" y="566928"/>
+            <a:ext cx="9448495" cy="868680"/>
           </a:xfrm>
         </p:spPr>
         <p:txBody>
@@ -4254,7 +4466,7 @@
             <a:r>
               <a:rPr sz="3000" b="1" i="0">
                 <a:solidFill>
-                  <a:srgbClr val="416F1F"/>
+                  <a:srgbClr val="26231F"/>
                 </a:solidFill>
               </a:rPr>
               <a:t>답례 안내</a:t>
@@ -4264,27 +4476,25 @@
       </p:sp>
       <p:sp>
         <p:nvSpPr>
-          <p:cNvPr id="5" name="카드 1"/>
+          <p:cNvPr id="6" name="카드 1"/>
           <p:cNvSpPr/>
           <p:nvPr/>
         </p:nvSpPr>
         <p:spPr>
           <a:xfrm>
-            <a:off x="640080" y="1600200"/>
-            <a:ext cx="3484778" cy="4800600"/>
+            <a:off x="640080" y="1783080"/>
+            <a:ext cx="3484778" cy="4572000"/>
           </a:xfrm>
           <a:prstGeom prst="roundRect">
             <a:avLst>
-              <a:gd name="adj" fmla="val 8000"/>
+              <a:gd name="adj" fmla="val 7000"/>
             </a:avLst>
           </a:prstGeom>
           <a:solidFill>
-            <a:srgbClr val="F7FCF3"/>
+            <a:srgbClr val="F2FDEA"/>
           </a:solidFill>
-          <a:ln w="15875">
-            <a:solidFill>
-              <a:srgbClr val="E3F7D4"/>
-            </a:solidFill>
+          <a:ln>
+            <a:noFill/>
           </a:ln>
         </p:spPr>
         <p:txBody>
@@ -4297,23 +4507,23 @@
       </p:sp>
       <p:sp>
         <p:nvSpPr>
-          <p:cNvPr id="6" name="번호 1"/>
+          <p:cNvPr id="7" name="번호 1"/>
           <p:cNvSpPr/>
           <p:nvPr/>
         </p:nvSpPr>
         <p:spPr>
           <a:xfrm>
-            <a:off x="822959" y="1783080"/>
+            <a:off x="822959" y="1965960"/>
             <a:ext cx="457200" cy="457200"/>
           </a:xfrm>
           <a:prstGeom prst="ellipse">
             <a:avLst/>
           </a:prstGeom>
-          <a:solidFill>
-            <a:srgbClr val="82CD4C"/>
-          </a:solidFill>
-          <a:ln>
-            <a:noFill/>
+          <a:noFill/>
+          <a:ln w="19050">
+            <a:solidFill>
+              <a:srgbClr val="BBED97"/>
+            </a:solidFill>
           </a:ln>
         </p:spPr>
         <p:txBody>
@@ -4330,7 +4540,7 @@
             <a:r>
               <a:rPr sz="1600" b="1" i="0">
                 <a:solidFill>
-                  <a:srgbClr val="FFFFFF"/>
+                  <a:srgbClr val="354927"/>
                 </a:solidFill>
               </a:rPr>
               <a:t>1</a:t>
@@ -4340,13 +4550,13 @@
       </p:sp>
       <p:sp>
         <p:nvSpPr>
-          <p:cNvPr id="7" name="TextBox 6"/>
+          <p:cNvPr id="8" name="TextBox 7"/>
           <p:cNvSpPr txBox="1"/>
           <p:nvPr/>
         </p:nvSpPr>
         <p:spPr>
           <a:xfrm>
-            <a:off x="777240" y="2377440"/>
+            <a:off x="777240" y="2560320"/>
             <a:ext cx="3210458" cy="640080"/>
           </a:xfrm>
           <a:prstGeom prst="rect">
@@ -4368,7 +4578,7 @@
             <a:r>
               <a:rPr sz="1800" b="1" i="0">
                 <a:solidFill>
-                  <a:srgbClr val="416F1F"/>
+                  <a:srgbClr val="354927"/>
                 </a:solidFill>
               </a:rPr>
               <a:t>답례품</a:t>
@@ -4378,14 +4588,14 @@
       </p:sp>
       <p:sp>
         <p:nvSpPr>
-          <p:cNvPr id="8" name="TextBox 7"/>
+          <p:cNvPr id="9" name="TextBox 8"/>
           <p:cNvSpPr txBox="1"/>
           <p:nvPr/>
         </p:nvSpPr>
         <p:spPr>
           <a:xfrm>
-            <a:off x="777240" y="3063240"/>
-            <a:ext cx="3210458" cy="3200400"/>
+            <a:off x="777240" y="3246120"/>
+            <a:ext cx="3210458" cy="2971800"/>
           </a:xfrm>
           <a:prstGeom prst="rect">
             <a:avLst/>
@@ -4406,7 +4616,7 @@
             <a:r>
               <a:rPr sz="1500" b="0" i="0">
                 <a:solidFill>
-                  <a:srgbClr val="2B2B2B"/>
+                  <a:srgbClr val="26231F"/>
                 </a:solidFill>
               </a:rPr>
               <a:t>입력하세요</a:t>
@@ -4416,27 +4626,25 @@
       </p:sp>
       <p:sp>
         <p:nvSpPr>
-          <p:cNvPr id="9" name="카드 2"/>
+          <p:cNvPr id="10" name="카드 2"/>
           <p:cNvSpPr/>
           <p:nvPr/>
         </p:nvSpPr>
         <p:spPr>
           <a:xfrm>
-            <a:off x="4353458" y="1600200"/>
-            <a:ext cx="3484778" cy="4800600"/>
+            <a:off x="4353458" y="1783080"/>
+            <a:ext cx="3484778" cy="4572000"/>
           </a:xfrm>
           <a:prstGeom prst="roundRect">
             <a:avLst>
-              <a:gd name="adj" fmla="val 8000"/>
+              <a:gd name="adj" fmla="val 7000"/>
             </a:avLst>
           </a:prstGeom>
           <a:solidFill>
-            <a:srgbClr val="F7FCF3"/>
+            <a:srgbClr val="F2FDEA"/>
           </a:solidFill>
-          <a:ln w="15875">
-            <a:solidFill>
-              <a:srgbClr val="E3F7D4"/>
-            </a:solidFill>
+          <a:ln>
+            <a:noFill/>
           </a:ln>
         </p:spPr>
         <p:txBody>
@@ -4449,23 +4657,23 @@
       </p:sp>
       <p:sp>
         <p:nvSpPr>
-          <p:cNvPr id="10" name="번호 2"/>
+          <p:cNvPr id="11" name="번호 2"/>
           <p:cNvSpPr/>
           <p:nvPr/>
         </p:nvSpPr>
         <p:spPr>
           <a:xfrm>
-            <a:off x="4536338" y="1783080"/>
+            <a:off x="4536338" y="1965960"/>
             <a:ext cx="457200" cy="457200"/>
           </a:xfrm>
           <a:prstGeom prst="ellipse">
             <a:avLst/>
           </a:prstGeom>
-          <a:solidFill>
-            <a:srgbClr val="82CD4C"/>
-          </a:solidFill>
-          <a:ln>
-            <a:noFill/>
+          <a:noFill/>
+          <a:ln w="19050">
+            <a:solidFill>
+              <a:srgbClr val="BBED97"/>
+            </a:solidFill>
           </a:ln>
         </p:spPr>
         <p:txBody>
@@ -4482,7 +4690,7 @@
             <a:r>
               <a:rPr sz="1600" b="1" i="0">
                 <a:solidFill>
-                  <a:srgbClr val="FFFFFF"/>
+                  <a:srgbClr val="354927"/>
                 </a:solidFill>
               </a:rPr>
               <a:t>2</a:t>
@@ -4492,13 +4700,13 @@
       </p:sp>
       <p:sp>
         <p:nvSpPr>
-          <p:cNvPr id="11" name="TextBox 10"/>
+          <p:cNvPr id="12" name="TextBox 11"/>
           <p:cNvSpPr txBox="1"/>
           <p:nvPr/>
         </p:nvSpPr>
         <p:spPr>
           <a:xfrm>
-            <a:off x="4490618" y="2377440"/>
+            <a:off x="4490618" y="2560320"/>
             <a:ext cx="3210458" cy="640080"/>
           </a:xfrm>
           <a:prstGeom prst="rect">
@@ -4520,7 +4728,7 @@
             <a:r>
               <a:rPr sz="1800" b="1" i="0">
                 <a:solidFill>
-                  <a:srgbClr val="416F1F"/>
+                  <a:srgbClr val="354927"/>
                 </a:solidFill>
               </a:rPr>
               <a:t>방명록</a:t>
@@ -4530,14 +4738,14 @@
       </p:sp>
       <p:sp>
         <p:nvSpPr>
-          <p:cNvPr id="12" name="TextBox 11"/>
+          <p:cNvPr id="13" name="TextBox 12"/>
           <p:cNvSpPr txBox="1"/>
           <p:nvPr/>
         </p:nvSpPr>
         <p:spPr>
           <a:xfrm>
-            <a:off x="4490618" y="3063240"/>
-            <a:ext cx="3210458" cy="3200400"/>
+            <a:off x="4490618" y="3246120"/>
+            <a:ext cx="3210458" cy="2971800"/>
           </a:xfrm>
           <a:prstGeom prst="rect">
             <a:avLst/>
@@ -4558,7 +4766,7 @@
             <a:r>
               <a:rPr sz="1500" b="0" i="0">
                 <a:solidFill>
-                  <a:srgbClr val="2B2B2B"/>
+                  <a:srgbClr val="26231F"/>
                 </a:solidFill>
               </a:rPr>
               <a:t>입력하세요</a:t>
@@ -4568,27 +4776,25 @@
       </p:sp>
       <p:sp>
         <p:nvSpPr>
-          <p:cNvPr id="13" name="카드 3"/>
+          <p:cNvPr id="14" name="카드 3"/>
           <p:cNvSpPr/>
           <p:nvPr/>
         </p:nvSpPr>
         <p:spPr>
           <a:xfrm>
-            <a:off x="8066836" y="1600200"/>
-            <a:ext cx="3484778" cy="4800600"/>
+            <a:off x="8066836" y="1783080"/>
+            <a:ext cx="3484778" cy="4572000"/>
           </a:xfrm>
           <a:prstGeom prst="roundRect">
             <a:avLst>
-              <a:gd name="adj" fmla="val 8000"/>
+              <a:gd name="adj" fmla="val 7000"/>
             </a:avLst>
           </a:prstGeom>
           <a:solidFill>
-            <a:srgbClr val="F7FCF3"/>
+            <a:srgbClr val="F2FDEA"/>
           </a:solidFill>
-          <a:ln w="15875">
-            <a:solidFill>
-              <a:srgbClr val="E3F7D4"/>
-            </a:solidFill>
+          <a:ln>
+            <a:noFill/>
           </a:ln>
         </p:spPr>
         <p:txBody>
@@ -4601,23 +4807,23 @@
       </p:sp>
       <p:sp>
         <p:nvSpPr>
-          <p:cNvPr id="14" name="번호 3"/>
+          <p:cNvPr id="15" name="번호 3"/>
           <p:cNvSpPr/>
           <p:nvPr/>
         </p:nvSpPr>
         <p:spPr>
           <a:xfrm>
-            <a:off x="8249716" y="1783080"/>
+            <a:off x="8249716" y="1965960"/>
             <a:ext cx="457200" cy="457200"/>
           </a:xfrm>
           <a:prstGeom prst="ellipse">
             <a:avLst/>
           </a:prstGeom>
-          <a:solidFill>
-            <a:srgbClr val="82CD4C"/>
-          </a:solidFill>
-          <a:ln>
-            <a:noFill/>
+          <a:noFill/>
+          <a:ln w="19050">
+            <a:solidFill>
+              <a:srgbClr val="BBED97"/>
+            </a:solidFill>
           </a:ln>
         </p:spPr>
         <p:txBody>
@@ -4634,7 +4840,7 @@
             <a:r>
               <a:rPr sz="1600" b="1" i="0">
                 <a:solidFill>
-                  <a:srgbClr val="FFFFFF"/>
+                  <a:srgbClr val="354927"/>
                 </a:solidFill>
               </a:rPr>
               <a:t>3</a:t>
@@ -4644,13 +4850,13 @@
       </p:sp>
       <p:sp>
         <p:nvSpPr>
-          <p:cNvPr id="15" name="TextBox 14"/>
+          <p:cNvPr id="16" name="TextBox 15"/>
           <p:cNvSpPr txBox="1"/>
           <p:nvPr/>
         </p:nvSpPr>
         <p:spPr>
           <a:xfrm>
-            <a:off x="8203996" y="2377440"/>
+            <a:off x="8203996" y="2560320"/>
             <a:ext cx="3210458" cy="640080"/>
           </a:xfrm>
           <a:prstGeom prst="rect">
@@ -4672,7 +4878,7 @@
             <a:r>
               <a:rPr sz="1800" b="1" i="0">
                 <a:solidFill>
-                  <a:srgbClr val="416F1F"/>
+                  <a:srgbClr val="354927"/>
                 </a:solidFill>
               </a:rPr>
               <a:t>사진 · 영상</a:t>
@@ -4682,14 +4888,14 @@
       </p:sp>
       <p:sp>
         <p:nvSpPr>
-          <p:cNvPr id="16" name="TextBox 15"/>
+          <p:cNvPr id="17" name="TextBox 16"/>
           <p:cNvSpPr txBox="1"/>
           <p:nvPr/>
         </p:nvSpPr>
         <p:spPr>
           <a:xfrm>
-            <a:off x="8203996" y="3063240"/>
-            <a:ext cx="3210458" cy="3200400"/>
+            <a:off x="8203996" y="3246120"/>
+            <a:ext cx="3210458" cy="2971800"/>
           </a:xfrm>
           <a:prstGeom prst="rect">
             <a:avLst/>
@@ -4710,7 +4916,7 @@
             <a:r>
               <a:rPr sz="1500" b="0" i="0">
                 <a:solidFill>
-                  <a:srgbClr val="2B2B2B"/>
+                  <a:srgbClr val="26231F"/>
                 </a:solidFill>
               </a:rPr>
               <a:t>입력하세요</a:t>
@@ -4732,7 +4938,7 @@
     <p:bg>
       <p:bgPr>
         <a:solidFill>
-          <a:srgbClr val="FFFFFF"/>
+          <a:srgbClr val="FBFDFA"/>
         </a:solidFill>
         <a:effectLst/>
       </p:bgPr>
@@ -4752,14 +4958,16 @@
         </p:nvSpPr>
         <p:spPr>
           <a:xfrm>
-            <a:off x="9905695" y="-1463040"/>
-            <a:ext cx="3840480" cy="3840480"/>
-          </a:xfrm>
-          <a:prstGeom prst="ellipse">
-            <a:avLst/>
+            <a:off x="640080" y="566928"/>
+            <a:ext cx="64008" cy="868680"/>
+          </a:xfrm>
+          <a:prstGeom prst="roundRect">
+            <a:avLst>
+              <a:gd name="adj" fmla="val 50000"/>
+            </a:avLst>
           </a:prstGeom>
           <a:solidFill>
-            <a:srgbClr val="E3F7D4"/>
+            <a:srgbClr val="BBED97"/>
           </a:solidFill>
           <a:ln>
             <a:noFill/>
@@ -4775,20 +4983,58 @@
       </p:sp>
       <p:sp>
         <p:nvSpPr>
-          <p:cNvPr id="4" name="장식"/>
+          <p:cNvPr id="4" name="상단 라벨"/>
+          <p:cNvSpPr txBox="1"/>
+          <p:nvPr/>
+        </p:nvSpPr>
+        <p:spPr>
+          <a:xfrm>
+            <a:off x="868680" y="274320"/>
+            <a:ext cx="5486400" cy="274320"/>
+          </a:xfrm>
+          <a:prstGeom prst="rect">
+            <a:avLst/>
+          </a:prstGeom>
+          <a:noFill/>
+        </p:spPr>
+        <p:txBody>
+          <a:bodyPr wrap="square" lIns="54864" rIns="54864" tIns="27432" bIns="27432" anchor="ctr">
+            <a:noAutofit/>
+          </a:bodyPr>
+          <a:lstStyle/>
+          <a:p>
+            <a:pPr algn="l">
+              <a:lnSpc>
+                <a:spcPct val="115000"/>
+              </a:lnSpc>
+            </a:pPr>
+            <a:r>
+              <a:rPr sz="900" b="1" i="0" spc="250">
+                <a:solidFill>
+                  <a:srgbClr val="8E8780"/>
+                </a:solidFill>
+              </a:rPr>
+              <a:t>WEDDING</a:t>
+            </a:r>
+          </a:p>
+        </p:txBody>
+      </p:sp>
+      <p:sp>
+        <p:nvSpPr>
+          <p:cNvPr id="5" name="포인트"/>
           <p:cNvSpPr/>
           <p:nvPr/>
         </p:nvSpPr>
         <p:spPr>
           <a:xfrm>
-            <a:off x="11094415" y="274320"/>
-            <a:ext cx="411480" cy="411480"/>
-          </a:xfrm>
-          <a:prstGeom prst="ellipse">
+            <a:off x="11167567" y="667512"/>
+            <a:ext cx="310896" cy="310896"/>
+          </a:xfrm>
+          <a:prstGeom prst="star4">
             <a:avLst/>
           </a:prstGeom>
           <a:solidFill>
-            <a:srgbClr val="82CD4C"/>
+            <a:srgbClr val="C6F2A6"/>
           </a:solidFill>
           <a:ln>
             <a:noFill/>
@@ -4814,8 +5060,8 @@
         </p:nvSpPr>
         <p:spPr>
           <a:xfrm>
-            <a:off x="640080" y="457200"/>
-            <a:ext cx="9722815" cy="868680"/>
+            <a:off x="868680" y="566928"/>
+            <a:ext cx="9448495" cy="868680"/>
           </a:xfrm>
         </p:spPr>
         <p:txBody>
@@ -4832,7 +5078,7 @@
             <a:r>
               <a:rPr sz="3000" b="1" i="0">
                 <a:solidFill>
-                  <a:srgbClr val="416F1F"/>
+                  <a:srgbClr val="26231F"/>
                 </a:solidFill>
               </a:rPr>
               <a:t>웨딩 사진</a:t>
@@ -4842,14 +5088,14 @@
       </p:sp>
       <p:sp>
         <p:nvSpPr>
-          <p:cNvPr id="5" name="사진 자리"/>
+          <p:cNvPr id="6" name="사진 자리"/>
           <p:cNvSpPr/>
           <p:nvPr/>
         </p:nvSpPr>
         <p:spPr>
           <a:xfrm>
-            <a:off x="640080" y="1600200"/>
-            <a:ext cx="3515258" cy="2308860"/>
+            <a:off x="640080" y="1783080"/>
+            <a:ext cx="3515258" cy="2194560"/>
           </a:xfrm>
           <a:prstGeom prst="roundRect">
             <a:avLst>
@@ -4857,12 +5103,10 @@
             </a:avLst>
           </a:prstGeom>
           <a:solidFill>
-            <a:srgbClr val="E3F7D4"/>
+            <a:srgbClr val="E2FAD1"/>
           </a:solidFill>
           <a:ln w="19050">
-            <a:solidFill>
-              <a:srgbClr val="82CD4C"/>
-            </a:solidFill>
+            <a:noFill/>
             <a:prstDash val="dash"/>
           </a:ln>
         </p:spPr>
@@ -4880,7 +5124,7 @@
             <a:r>
               <a:rPr sz="1200" b="0" i="0">
                 <a:solidFill>
-                  <a:srgbClr val="416F1F"/>
+                  <a:srgbClr val="8E8780"/>
                 </a:solidFill>
               </a:rPr>
               <a:t>사진 1</a:t>
@@ -4890,14 +5134,14 @@
       </p:sp>
       <p:sp>
         <p:nvSpPr>
-          <p:cNvPr id="6" name="사진 자리"/>
+          <p:cNvPr id="7" name="사진 자리"/>
           <p:cNvSpPr/>
           <p:nvPr/>
         </p:nvSpPr>
         <p:spPr>
           <a:xfrm>
-            <a:off x="4338218" y="1600200"/>
-            <a:ext cx="3515258" cy="2308860"/>
+            <a:off x="4338218" y="1783080"/>
+            <a:ext cx="3515258" cy="2194560"/>
           </a:xfrm>
           <a:prstGeom prst="roundRect">
             <a:avLst>
@@ -4905,12 +5149,10 @@
             </a:avLst>
           </a:prstGeom>
           <a:solidFill>
-            <a:srgbClr val="E3F7D4"/>
+            <a:srgbClr val="E2FAD1"/>
           </a:solidFill>
           <a:ln w="19050">
-            <a:solidFill>
-              <a:srgbClr val="82CD4C"/>
-            </a:solidFill>
+            <a:noFill/>
             <a:prstDash val="dash"/>
           </a:ln>
         </p:spPr>
@@ -4928,7 +5170,7 @@
             <a:r>
               <a:rPr sz="1200" b="0" i="0">
                 <a:solidFill>
-                  <a:srgbClr val="416F1F"/>
+                  <a:srgbClr val="8E8780"/>
                 </a:solidFill>
               </a:rPr>
               <a:t>사진 2</a:t>
@@ -4938,14 +5180,14 @@
       </p:sp>
       <p:sp>
         <p:nvSpPr>
-          <p:cNvPr id="7" name="사진 자리"/>
+          <p:cNvPr id="8" name="사진 자리"/>
           <p:cNvSpPr/>
           <p:nvPr/>
         </p:nvSpPr>
         <p:spPr>
           <a:xfrm>
-            <a:off x="8036356" y="1600200"/>
-            <a:ext cx="3515258" cy="2308860"/>
+            <a:off x="8036356" y="1783080"/>
+            <a:ext cx="3515258" cy="2194560"/>
           </a:xfrm>
           <a:prstGeom prst="roundRect">
             <a:avLst>
@@ -4953,12 +5195,10 @@
             </a:avLst>
           </a:prstGeom>
           <a:solidFill>
-            <a:srgbClr val="E3F7D4"/>
+            <a:srgbClr val="E2FAD1"/>
           </a:solidFill>
           <a:ln w="19050">
-            <a:solidFill>
-              <a:srgbClr val="82CD4C"/>
-            </a:solidFill>
+            <a:noFill/>
             <a:prstDash val="dash"/>
           </a:ln>
         </p:spPr>
@@ -4976,7 +5216,7 @@
             <a:r>
               <a:rPr sz="1200" b="0" i="0">
                 <a:solidFill>
-                  <a:srgbClr val="416F1F"/>
+                  <a:srgbClr val="8E8780"/>
                 </a:solidFill>
               </a:rPr>
               <a:t>사진 3</a:t>
@@ -4986,14 +5226,14 @@
       </p:sp>
       <p:sp>
         <p:nvSpPr>
-          <p:cNvPr id="8" name="사진 자리"/>
+          <p:cNvPr id="9" name="사진 자리"/>
           <p:cNvSpPr/>
           <p:nvPr/>
         </p:nvSpPr>
         <p:spPr>
           <a:xfrm>
-            <a:off x="640080" y="4091939"/>
-            <a:ext cx="3515258" cy="2308860"/>
+            <a:off x="640080" y="4160520"/>
+            <a:ext cx="3515258" cy="2194560"/>
           </a:xfrm>
           <a:prstGeom prst="roundRect">
             <a:avLst>
@@ -5001,12 +5241,10 @@
             </a:avLst>
           </a:prstGeom>
           <a:solidFill>
-            <a:srgbClr val="E3F7D4"/>
+            <a:srgbClr val="E2FAD1"/>
           </a:solidFill>
           <a:ln w="19050">
-            <a:solidFill>
-              <a:srgbClr val="82CD4C"/>
-            </a:solidFill>
+            <a:noFill/>
             <a:prstDash val="dash"/>
           </a:ln>
         </p:spPr>
@@ -5024,7 +5262,7 @@
             <a:r>
               <a:rPr sz="1200" b="0" i="0">
                 <a:solidFill>
-                  <a:srgbClr val="416F1F"/>
+                  <a:srgbClr val="8E8780"/>
                 </a:solidFill>
               </a:rPr>
               <a:t>사진 4</a:t>
@@ -5034,14 +5272,14 @@
       </p:sp>
       <p:sp>
         <p:nvSpPr>
-          <p:cNvPr id="9" name="사진 자리"/>
+          <p:cNvPr id="10" name="사진 자리"/>
           <p:cNvSpPr/>
           <p:nvPr/>
         </p:nvSpPr>
         <p:spPr>
           <a:xfrm>
-            <a:off x="4338218" y="4091939"/>
-            <a:ext cx="3515258" cy="2308860"/>
+            <a:off x="4338218" y="4160520"/>
+            <a:ext cx="3515258" cy="2194560"/>
           </a:xfrm>
           <a:prstGeom prst="roundRect">
             <a:avLst>
@@ -5049,12 +5287,10 @@
             </a:avLst>
           </a:prstGeom>
           <a:solidFill>
-            <a:srgbClr val="E3F7D4"/>
+            <a:srgbClr val="E2FAD1"/>
           </a:solidFill>
           <a:ln w="19050">
-            <a:solidFill>
-              <a:srgbClr val="82CD4C"/>
-            </a:solidFill>
+            <a:noFill/>
             <a:prstDash val="dash"/>
           </a:ln>
         </p:spPr>
@@ -5072,7 +5308,7 @@
             <a:r>
               <a:rPr sz="1200" b="0" i="0">
                 <a:solidFill>
-                  <a:srgbClr val="416F1F"/>
+                  <a:srgbClr val="8E8780"/>
                 </a:solidFill>
               </a:rPr>
               <a:t>사진 5</a:t>
@@ -5082,14 +5318,14 @@
       </p:sp>
       <p:sp>
         <p:nvSpPr>
-          <p:cNvPr id="10" name="사진 자리"/>
+          <p:cNvPr id="11" name="사진 자리"/>
           <p:cNvSpPr/>
           <p:nvPr/>
         </p:nvSpPr>
         <p:spPr>
           <a:xfrm>
-            <a:off x="8036356" y="4091939"/>
-            <a:ext cx="3515258" cy="2308860"/>
+            <a:off x="8036356" y="4160520"/>
+            <a:ext cx="3515258" cy="2194560"/>
           </a:xfrm>
           <a:prstGeom prst="roundRect">
             <a:avLst>
@@ -5097,12 +5333,10 @@
             </a:avLst>
           </a:prstGeom>
           <a:solidFill>
-            <a:srgbClr val="E3F7D4"/>
+            <a:srgbClr val="E2FAD1"/>
           </a:solidFill>
           <a:ln w="19050">
-            <a:solidFill>
-              <a:srgbClr val="82CD4C"/>
-            </a:solidFill>
+            <a:noFill/>
             <a:prstDash val="dash"/>
           </a:ln>
         </p:spPr>
@@ -5120,7 +5354,7 @@
             <a:r>
               <a:rPr sz="1200" b="0" i="0">
                 <a:solidFill>
-                  <a:srgbClr val="416F1F"/>
+                  <a:srgbClr val="8E8780"/>
                 </a:solidFill>
               </a:rPr>
               <a:t>사진 6</a:t>
@@ -5139,6 +5373,14 @@
 <file path=ppt/slides/slide6.xml><?xml version="1.0" encoding="utf-8"?>
 <p:sld xmlns:a="http://schemas.openxmlformats.org/drawingml/2006/main" xmlns:p="http://schemas.openxmlformats.org/presentationml/2006/main" xmlns:r="http://schemas.openxmlformats.org/officeDocument/2006/relationships">
   <p:cSld>
+    <p:bg>
+      <p:bgPr>
+        <a:solidFill>
+          <a:srgbClr val="F2FDEA"/>
+        </a:solidFill>
+        <a:effectLst/>
+      </p:bgPr>
+    </p:bg>
     <p:spTree>
       <p:nvGrpSpPr>
         <p:cNvPr id="1" name=""/>
@@ -5146,30 +5388,120 @@
         <p:nvPr/>
       </p:nvGrpSpPr>
       <p:grpSpPr/>
-      <p:pic>
-        <p:nvPicPr>
-          <p:cNvPr id="3" name="표지 그림" descr="wedding-05.jpg"/>
-          <p:cNvPicPr>
-            <a:picLocks noChangeAspect="1"/>
-          </p:cNvPicPr>
+      <p:sp>
+        <p:nvSpPr>
+          <p:cNvPr id="3" name="사진 자리"/>
+          <p:cNvSpPr/>
           <p:nvPr/>
-        </p:nvPicPr>
-        <p:blipFill>
-          <a:blip r:embed="rId2"/>
-          <a:stretch>
-            <a:fillRect/>
-          </a:stretch>
-        </p:blipFill>
-        <p:spPr>
-          <a:xfrm>
-            <a:off x="0" y="0"/>
-            <a:ext cx="12191695" cy="6858000"/>
+        </p:nvSpPr>
+        <p:spPr>
+          <a:xfrm>
+            <a:off x="7071183" y="960120"/>
+            <a:ext cx="3657508" cy="4526280"/>
+          </a:xfrm>
+          <a:prstGeom prst="roundRect">
+            <a:avLst>
+              <a:gd name="adj" fmla="val 4000"/>
+            </a:avLst>
+          </a:prstGeom>
+          <a:solidFill>
+            <a:srgbClr val="C6F2A6"/>
+          </a:solidFill>
+          <a:ln>
+            <a:noFill/>
+          </a:ln>
+        </p:spPr>
+        <p:txBody>
+          <a:bodyPr rtlCol="0" anchor="ctr" wrap="square" lIns="54864" rIns="54864" tIns="27432" bIns="27432">
+            <a:noAutofit/>
+          </a:bodyPr>
+          <a:lstStyle/>
+          <a:p>
+            <a:pPr algn="ctr">
+              <a:lnSpc>
+                <a:spcPct val="100000"/>
+              </a:lnSpc>
+            </a:pPr>
+            <a:r>
+              <a:rPr sz="1400" b="0" i="0">
+                <a:solidFill>
+                  <a:srgbClr val="354927"/>
+                </a:solidFill>
+              </a:rPr>
+              <a:t>사진을 넣어 주세요</a:t>
+            </a:r>
+          </a:p>
+        </p:txBody>
+      </p:sp>
+      <p:sp>
+        <p:nvSpPr>
+          <p:cNvPr id="4" name="장식"/>
+          <p:cNvSpPr/>
+          <p:nvPr/>
+        </p:nvSpPr>
+        <p:spPr>
+          <a:xfrm>
+            <a:off x="7558851" y="1234439"/>
+            <a:ext cx="3657508" cy="4526280"/>
+          </a:xfrm>
+          <a:prstGeom prst="roundRect">
+            <a:avLst>
+              <a:gd name="adj" fmla="val 4000"/>
+            </a:avLst>
+          </a:prstGeom>
+          <a:noFill/>
+          <a:ln w="9525">
+            <a:solidFill>
+              <a:srgbClr val="26231F"/>
+            </a:solidFill>
+          </a:ln>
+        </p:spPr>
+        <p:txBody>
+          <a:bodyPr rtlCol="0" anchor="ctr"/>
+          <a:lstStyle/>
+          <a:p>
+            <a:pPr algn="ctr"/>
+          </a:p>
+        </p:txBody>
+      </p:sp>
+      <p:sp>
+        <p:nvSpPr>
+          <p:cNvPr id="5" name="라벨"/>
+          <p:cNvSpPr txBox="1"/>
+          <p:nvPr/>
+        </p:nvSpPr>
+        <p:spPr>
+          <a:xfrm>
+            <a:off x="822960" y="2148840"/>
+            <a:ext cx="5608179" cy="274320"/>
           </a:xfrm>
           <a:prstGeom prst="rect">
             <a:avLst/>
           </a:prstGeom>
-        </p:spPr>
-      </p:pic>
+          <a:noFill/>
+        </p:spPr>
+        <p:txBody>
+          <a:bodyPr wrap="square" lIns="54864" rIns="54864" tIns="27432" bIns="27432" anchor="t">
+            <a:noAutofit/>
+          </a:bodyPr>
+          <a:lstStyle/>
+          <a:p>
+            <a:pPr algn="l">
+              <a:lnSpc>
+                <a:spcPct val="115000"/>
+              </a:lnSpc>
+            </a:pPr>
+            <a:r>
+              <a:rPr sz="1000" b="1" i="0" spc="250">
+                <a:solidFill>
+                  <a:srgbClr val="26231F"/>
+                </a:solidFill>
+              </a:rPr>
+              <a:t>WEDDING</a:t>
+            </a:r>
+          </a:p>
+        </p:txBody>
+      </p:sp>
       <p:sp>
         <p:nvSpPr>
           <p:cNvPr id="2" name="Title 1"/>
@@ -5182,8 +5514,8 @@
         </p:nvSpPr>
         <p:spPr>
           <a:xfrm>
-            <a:off x="853418" y="2057400"/>
-            <a:ext cx="6095847" cy="1554480"/>
+            <a:off x="822960" y="2606040"/>
+            <a:ext cx="5608179" cy="1188720"/>
           </a:xfrm>
         </p:spPr>
         <p:txBody>
@@ -5200,7 +5532,7 @@
             <a:r>
               <a:rPr sz="3400" b="1" i="0">
                 <a:solidFill>
-                  <a:srgbClr val="416F1F"/>
+                  <a:srgbClr val="26231F"/>
                 </a:solidFill>
               </a:rPr>
               <a:t>와 주셔서 고맙습니다</a:t>
@@ -5210,14 +5542,14 @@
       </p:sp>
       <p:sp>
         <p:nvSpPr>
-          <p:cNvPr id="4" name="한 줄 문구"/>
+          <p:cNvPr id="6" name="한 줄 문구"/>
           <p:cNvSpPr txBox="1"/>
           <p:nvPr/>
         </p:nvSpPr>
         <p:spPr>
           <a:xfrm>
-            <a:off x="853418" y="3749039"/>
-            <a:ext cx="6095847" cy="822960"/>
+            <a:off x="822960" y="3886200"/>
+            <a:ext cx="5608179" cy="822960"/>
           </a:xfrm>
           <a:prstGeom prst="rect">
             <a:avLst/>
@@ -5236,9 +5568,9 @@
               </a:lnSpc>
             </a:pPr>
             <a:r>
-              <a:rPr sz="1700" b="0" i="1">
-                <a:solidFill>
-                  <a:srgbClr val="416F1F"/>
+              <a:rPr sz="1700" b="0" i="0">
+                <a:solidFill>
+                  <a:srgbClr val="26231F"/>
                 </a:solidFill>
               </a:rPr>
               <a:t>잘 살겠습니다</a:t>
@@ -5248,14 +5580,14 @@
       </p:sp>
       <p:sp>
         <p:nvSpPr>
-          <p:cNvPr id="5" name="안내 문구"/>
+          <p:cNvPr id="7" name="안내 문구"/>
           <p:cNvSpPr txBox="1"/>
           <p:nvPr/>
         </p:nvSpPr>
         <p:spPr>
           <a:xfrm>
-            <a:off x="853418" y="4617720"/>
-            <a:ext cx="6095847" cy="914400"/>
+            <a:off x="822960" y="4754880"/>
+            <a:ext cx="5608179" cy="914400"/>
           </a:xfrm>
           <a:prstGeom prst="rect">
             <a:avLst/>
@@ -5276,7 +5608,7 @@
             <a:r>
               <a:rPr sz="1400" b="0" i="0">
                 <a:solidFill>
-                  <a:srgbClr val="666666"/>
+                  <a:srgbClr val="26231F"/>
                 </a:solidFill>
               </a:rPr>
               <a:t>신랑 이름 ♥ 신부 이름</a:t>
@@ -5303,34 +5635,34 @@
         <a:sysClr val="window" lastClr="FFFFFF"/>
       </a:lt1>
       <a:dk2>
-        <a:srgbClr val="416F1F"/>
+        <a:srgbClr val="354927"/>
       </a:dk2>
       <a:lt2>
-        <a:srgbClr val="F7FCF3"/>
+        <a:srgbClr val="F2FDEA"/>
       </a:lt2>
       <a:accent1>
-        <a:srgbClr val="82CD4C"/>
+        <a:srgbClr val="BBED97"/>
       </a:accent1>
       <a:accent2>
-        <a:srgbClr val="339941"/>
+        <a:srgbClr val="BAF3BC"/>
       </a:accent2>
       <a:accent3>
-        <a:srgbClr val="416F1F"/>
+        <a:srgbClr val="354927"/>
       </a:accent3>
       <a:accent4>
-        <a:srgbClr val="E3F7D4"/>
+        <a:srgbClr val="E2FAD1"/>
       </a:accent4>
       <a:accent5>
-        <a:srgbClr val="5AB346"/>
+        <a:srgbClr val="BAF0AA"/>
       </a:accent5>
       <a:accent6>
-        <a:srgbClr val="8DA979"/>
+        <a:srgbClr val="86927D"/>
       </a:accent6>
       <a:hlink>
-        <a:srgbClr val="82CD4C"/>
+        <a:srgbClr val="BBED97"/>
       </a:hlink>
       <a:folHlink>
-        <a:srgbClr val="416F1F"/>
+        <a:srgbClr val="354927"/>
       </a:folHlink>
     </a:clrScheme>
     <a:fontScheme name="Office">
